--- a/public/fun/pack/pptx/reviewpro/보장점검양식프리미엄_25_사업장점검_선셋로즈.pptx
+++ b/public/fun/pack/pptx/reviewpro/보장점검양식프리미엄_25_사업장점검_선셋로즈.pptx
@@ -112,12 +112,12 @@
   <p:extLst>
     <p:ext uri="{521415D9-36F7-43E2-AB2F-B90AF26B5E84}">
       <p14:sectionLst xmlns:p14="http://schemas.microsoft.com/office/powerpoint/2010/main">
-        <p14:section name="시작" id="{FA288391-2D0A-47B4-9229-FF76DC98FB0C}">
+        <p14:section name="시작" id="{7BC66A51-FE12-4586-8581-13CB58D64DB8}">
           <p14:sldIdLst>
             <p14:sldId id="256"/>
           </p14:sldIdLst>
         </p14:section>
-        <p14:section name="본문" id="{15638358-AAB8-41BE-9920-EE2A01D5DED2}">
+        <p14:section name="본문" id="{0911C149-27FB-40C7-B382-AF25A6162F6F}">
           <p14:sldIdLst>
             <p14:sldId id="257"/>
             <p14:sldId id="258"/>
@@ -1603,7 +1603,7 @@
             </a:lvl1pPr>
           </a:lstStyle>
           <a:p>
-            <a:fld id="{4F56C8F8-1A0A-4E24-9F03-D66E0C1D7217}" type="slidenum">
+            <a:fld id="{1B82613B-CF4B-4B2F-BE5B-C60885AD3015}" type="slidenum">
               <a:rPr lang="en-US"/>
               <a:t>‹#›</a:t>
             </a:fld>
@@ -2314,7 +2314,7 @@
             </a:lvl1pPr>
           </a:lstStyle>
           <a:p>
-            <a:fld id="{6C8C3C0F-6D9D-43D2-A6B4-F9C71D402889}" type="slidenum">
+            <a:fld id="{3A730EE7-56A1-4BA8-8506-86D762A78E30}" type="slidenum">
               <a:rPr lang="en-US"/>
               <a:t>‹#›</a:t>
             </a:fld>
@@ -3006,7 +3006,7 @@
             </a:lvl1pPr>
           </a:lstStyle>
           <a:p>
-            <a:fld id="{3F8D9029-4C75-4891-9B02-70F181DB7CF2}" type="slidenum">
+            <a:fld id="{9D49107C-77FD-48D8-9C5F-D94C0ED9FE3F}" type="slidenum">
               <a:rPr lang="en-US"/>
               <a:t>‹#›</a:t>
             </a:fld>
@@ -3873,7 +3873,7 @@
           <a:p>
             <a:r>
               <a:rPr lang="ko-KR"/>
-              <a:t>사업장 점검 · 0000. 00. 00</a:t>
+              <a:t>사업장 점검 · 날짜 입력</a:t>
             </a:r>
           </a:p>
           <a:p>
@@ -3964,7 +3964,7 @@
           <a:bodyPr/>
           <a:lstStyle/>
           <a:p>
-            <a:fld id="{E79E80F3-62F6-458E-8C6C-1D18847EAAD2}" type="slidenum">
+            <a:fld id="{8E991EDC-2107-45B9-AA7B-7A887C17221C}" type="slidenum">
               <a:rPr lang="en-US"/>
               <a:t>‹#›</a:t>
             </a:fld>
@@ -4480,7 +4480,7 @@
           <a:bodyPr/>
           <a:lstStyle/>
           <a:p>
-            <a:fld id="{064F51F7-4F94-41DD-9B31-A8B9216285A9}" type="slidenum">
+            <a:fld id="{78379596-3EEA-4A7B-99F4-D67409D6C471}" type="slidenum">
               <a:rPr lang="en-US"/>
               <a:t>‹#›</a:t>
             </a:fld>
@@ -5986,7 +5986,7 @@
           <a:bodyPr/>
           <a:lstStyle/>
           <a:p>
-            <a:fld id="{7DD80184-FE7D-4220-93B2-3D577CE41158}" type="slidenum">
+            <a:fld id="{27292E44-1A86-48E2-ACE9-F61408422A5C}" type="slidenum">
               <a:rPr lang="en-US"/>
               <a:t>‹#›</a:t>
             </a:fld>
@@ -7536,7 +7536,7 @@
           <a:bodyPr/>
           <a:lstStyle/>
           <a:p>
-            <a:fld id="{65DDC4D9-8FD1-4BDB-B0DB-C3DAE46CA9EA}" type="slidenum">
+            <a:fld id="{2122D573-85BE-46D5-93A2-72FA0436EE22}" type="slidenum">
               <a:rPr lang="en-US"/>
               <a:t>‹#›</a:t>
             </a:fld>
@@ -8416,7 +8416,7 @@
           <a:bodyPr/>
           <a:lstStyle/>
           <a:p>
-            <a:fld id="{873B4D50-2182-4AC6-91E9-2353DEBE5525}" type="slidenum">
+            <a:fld id="{60C6AF92-9BED-4F51-9F1F-72CCD5CF4A78}" type="slidenum">
               <a:rPr lang="en-US"/>
               <a:t>‹#›</a:t>
             </a:fld>
